--- a/SIHPPT1.pptx
+++ b/SIHPPT1.pptx
@@ -10516,7 +10516,7 @@
                 </a:solidFill>
                 <a:latin typeface="Arial"/>
               </a:rPr>
-              <a:t>base fare not shown</a:t>
+              <a:t>no tax or fee breakdown</a:t>
             </a:r>
           </a:p>
         </p:txBody>
@@ -10561,7 +10561,7 @@
                 </a:solidFill>
                 <a:latin typeface="Arial"/>
               </a:rPr>
-              <a:t>base_fare = NULL</a:t>
+              <a:t>stored NULL, never derived</a:t>
             </a:r>
           </a:p>
         </p:txBody>
@@ -10606,7 +10606,7 @@
                 </a:solidFill>
                 <a:latin typeface="Arial"/>
               </a:rPr>
-              <a:t>we never estimate what a page omits</a:t>
+              <a:t>a CPI prices the total a household pays</a:t>
             </a:r>
           </a:p>
         </p:txBody>

--- a/SIHPPT1.pptx
+++ b/SIHPPT1.pptx
@@ -7553,7 +7553,7 @@
                 </a:solidFill>
                 <a:latin typeface="Arial"/>
               </a:rPr>
-              <a:t>August 2026 = 100</a:t>
+              <a:t>first observation day = 100</a:t>
             </a:r>
           </a:p>
         </p:txBody>
